--- a/courses/learn_yosys/module00-00-intro/slides.pptx
+++ b/courses/learn_yosys/module00-00-intro/slides.pptx
@@ -11,6 +11,7 @@
     <p:sldId id="259" r:id="rId11"/>
     <p:sldId id="260" r:id="rId12"/>
     <p:sldId id="261" r:id="rId13"/>
+    <p:sldId id="262" r:id="rId14"/>
   </p:sldIdLst>
   <p:sldSz cx="12191695" cy="6858000" type="screen4x3"/>
   <p:notesSz cx="6858000" cy="9144000"/>
@@ -507,7 +508,7 @@
           <a:lstStyle/>
           <a:p>
             <a:r>
-              <a:t>learn_yosys has two parts: Part A teaches pass *ideas* on a toy netlist; Part B drives **real Yosys** with `.ys` scripts on `tiny_and_or.v`.</a:t>
+              <a:t>learn_yosys has three parts: Part A is the interactive pass map on a small netlist; Part B drives real Yosys with .ys scripts on tiny_and_or.v; Part C teaches Yosys algorithms bound to real evidence.</a:t>
             </a:r>
           </a:p>
         </p:txBody>
@@ -577,7 +578,7 @@
           <a:lstStyle/>
           <a:p>
             <a:r>
-              <a:t>Toy tiny_yosys: 6 cells; flatten→1; opt→5; strash→4; rewrite→3; nand 6/7 — names match Yosys passes, but it is not the Yosys binary.</a:t>
+              <a:t>Pass map on tiny_yosys: 6 cells; flatten→1; opt→5; strash→4; rewrite→3; nand 6/7 — same pass names as Yosys, in the browser.</a:t>
             </a:r>
           </a:p>
         </p:txBody>
@@ -647,7 +648,7 @@
           <a:lstStyle/>
           <a:p>
             <a:r>
-              <a:t>Real path: `read_verilog` → `hierarchy` → `proc` → `flatten` → `opt` → `aigmap`/`synth` → `stat`/`write`. Goldens come from Yosys logs.</a:t>
+              <a:t>Part B: real binary, RTLIL cells, and checked-in goldens from Yosys 0.9 on tiny_and_or.v.</a:t>
             </a:r>
           </a:p>
         </p:txBody>
@@ -717,7 +718,7 @@
           <a:lstStyle/>
           <a:p>
             <a:r>
-              <a:t>Implement track: `common/solvers.py` (toy) and `common/real_solvers.py` (evidence). Browser labs mirror both.</a:t>
+              <a:t>Part C: proc_mux, proc_dff ($adff), opt, techmap, extract, memory, fsm, and ABC handoff — each bound to real Yosys stats.</a:t>
             </a:r>
           </a:p>
         </p:txBody>
@@ -787,7 +788,7 @@
           <a:lstStyle/>
           <a:p>
             <a:r>
-              <a:t>Yosys IR is RTLIL — `$and`, `$dff`, later `$_AOI3_` / `$_DFF_P_` after synth. You will read `stat` and `dump`.</a:t>
+              <a:t>Implement track: common/solvers.py (pass map), common/real_solvers.py (evidence), and common/algo_solvers.py plus partc_bind.py (algorithms). Browser labs mirror all three.</a:t>
             </a:r>
           </a:p>
         </p:txBody>
@@ -857,7 +858,77 @@
           <a:lstStyle/>
           <a:p>
             <a:r>
-              <a:t>Start with the toy proc lab for pass names, then continue into the real CLI modules.</a:t>
+              <a:t>Open the course labs. Start at the pass-map proc lab, continue into the real CLI modules, then the Part C algorithm labs.</a:t>
+            </a:r>
+          </a:p>
+        </p:txBody>
+      </p:sp>
+      <p:sp>
+        <p:nvSpPr>
+          <p:cNvPr id="4" name="Slide Number Placeholder 3"/>
+          <p:cNvSpPr>
+            <a:spLocks noGrp="1"/>
+          </p:cNvSpPr>
+          <p:nvPr>
+            <p:ph type="sldNum" idx="5" sz="quarter"/>
+          </p:nvPr>
+        </p:nvSpPr>
+        <p:spPr/>
+      </p:sp>
+    </p:spTree>
+  </p:cSld>
+  <p:clrMapOvr>
+    <a:masterClrMapping/>
+  </p:clrMapOvr>
+</p:notes>
+</file>
+
+<file path=ppt/notesSlides/notesSlide7.xml><?xml version="1.0" encoding="utf-8"?>
+<p:notes xmlns:a="http://schemas.openxmlformats.org/drawingml/2006/main" xmlns:p="http://schemas.openxmlformats.org/presentationml/2006/main" xmlns:r="http://schemas.openxmlformats.org/officeDocument/2006/relationships">
+  <p:cSld>
+    <p:spTree>
+      <p:nvGrpSpPr>
+        <p:cNvPr id="1" name=""/>
+        <p:cNvGrpSpPr/>
+        <p:nvPr/>
+      </p:nvGrpSpPr>
+      <p:grpSpPr>
+        <a:xfrm>
+          <a:off x="0" y="0"/>
+          <a:ext cx="0" cy="0"/>
+          <a:chOff x="0" y="0"/>
+          <a:chExt cx="0" cy="0"/>
+        </a:xfrm>
+      </p:grpSpPr>
+      <p:sp>
+        <p:nvSpPr>
+          <p:cNvPr id="2" name="Slide Image Placeholder 1"/>
+          <p:cNvSpPr>
+            <a:spLocks noGrp="1"/>
+          </p:cNvSpPr>
+          <p:nvPr>
+            <p:ph type="sldImg" idx="2"/>
+          </p:nvPr>
+        </p:nvSpPr>
+        <p:spPr/>
+      </p:sp>
+      <p:sp>
+        <p:nvSpPr>
+          <p:cNvPr id="3" name="Notes Placeholder 2"/>
+          <p:cNvSpPr>
+            <a:spLocks noGrp="1"/>
+          </p:cNvSpPr>
+          <p:nvPr>
+            <p:ph type="body" idx="3" sz="quarter"/>
+          </p:nvPr>
+        </p:nvSpPr>
+        <p:spPr/>
+        <p:txBody>
+          <a:bodyPr/>
+          <a:lstStyle/>
+          <a:p>
+            <a:r>
+              <a:t>Start with the pass-map proc lab for pass names, continue into the real CLI modules, then the Part C algorithm labs.</a:t>
             </a:r>
           </a:p>
         </p:txBody>
@@ -3900,7 +3971,7 @@
                 </a:solidFill>
                 <a:latin typeface="Calibri"/>
               </a:rPr>
-              <a:t>Welcome</a:t>
+              <a:t>Why Yosys</a:t>
             </a:r>
           </a:p>
           <a:p>
@@ -3919,7 +3990,7 @@
                 </a:solidFill>
                 <a:latin typeface="Calibri"/>
               </a:rPr>
-              <a:t>Learn_yosys has two parts</a:t>
+              <a:t>Learn_yosys has three parts</a:t>
             </a:r>
           </a:p>
         </p:txBody>
@@ -4015,7 +4086,7 @@
                 </a:solidFill>
                 <a:latin typeface="Calibri"/>
               </a:rPr>
-              <a:t>Part A literacy</a:t>
+              <a:t>Part A pass map</a:t>
             </a:r>
           </a:p>
         </p:txBody>
@@ -4060,7 +4131,7 @@
                 </a:solidFill>
                 <a:latin typeface="Calibri"/>
               </a:rPr>
-              <a:t>Toy tiny_yosys</a:t>
+              <a:t>Pass map on tiny_yosys</a:t>
             </a:r>
           </a:p>
         </p:txBody>
@@ -4201,29 +4272,7 @@
                 </a:solidFill>
                 <a:latin typeface="Calibri"/>
               </a:rPr>
-              <a:t>Real path: `read_verilog` → `hierarchy` → `proc` → `flatten` → `opt` → `aigmap`/`synth` →</a:t>
-            </a:r>
-          </a:p>
-          <a:p>
-            <a:pPr lvl="0" marL="457200" indent="-228600">
-              <a:buFont typeface="Calibri"/>
-              <a:spcAft>
-                <a:spcPts val="1000"/>
-              </a:spcAft>
-              <a:buSzPct val="100000"/>
-              <a:buChar char="•"/>
-              <a:lnSpc>
-                <a:spcPts val="2200"/>
-              </a:lnSpc>
-            </a:pPr>
-            <a:r>
-              <a:rPr sz="2000" b="0">
-                <a:solidFill>
-                  <a:srgbClr val="333333"/>
-                </a:solidFill>
-                <a:latin typeface="Calibri"/>
-              </a:rPr>
-              <a:t>Goldens come from Yosys logs</a:t>
+              <a:t>Part B: real binary, RTLIL cells, and checked-in goldens from Yosys 0.9 on tiny_and_or.v</a:t>
             </a:r>
           </a:p>
         </p:txBody>
@@ -4319,7 +4368,7 @@
                 </a:solidFill>
                 <a:latin typeface="Calibri"/>
               </a:rPr>
-              <a:t>Two tracks</a:t>
+              <a:t>Part C algorithms</a:t>
             </a:r>
           </a:p>
         </p:txBody>
@@ -4364,29 +4413,7 @@
                 </a:solidFill>
                 <a:latin typeface="Calibri"/>
               </a:rPr>
-              <a:t>Implement track: `common/solvers.py` (toy) and `common/real_solvers.py` (evidence)</a:t>
-            </a:r>
-          </a:p>
-          <a:p>
-            <a:pPr lvl="0" marL="457200" indent="-228600">
-              <a:buFont typeface="Calibri"/>
-              <a:spcAft>
-                <a:spcPts val="1000"/>
-              </a:spcAft>
-              <a:buSzPct val="100000"/>
-              <a:buChar char="•"/>
-              <a:lnSpc>
-                <a:spcPts val="2200"/>
-              </a:lnSpc>
-            </a:pPr>
-            <a:r>
-              <a:rPr sz="2000" b="0">
-                <a:solidFill>
-                  <a:srgbClr val="333333"/>
-                </a:solidFill>
-                <a:latin typeface="Calibri"/>
-              </a:rPr>
-              <a:t>Browser labs mirror both</a:t>
+              <a:t>Part C: proc_mux, proc_dff ($adff), opt, techmap, extract, memory, fsm</a:t>
             </a:r>
           </a:p>
         </p:txBody>
@@ -4482,7 +4509,7 @@
                 </a:solidFill>
                 <a:latin typeface="Calibri"/>
               </a:rPr>
-              <a:t>RTLIL</a:t>
+              <a:t>Implement track</a:t>
             </a:r>
           </a:p>
         </p:txBody>
@@ -4527,7 +4554,7 @@
                 </a:solidFill>
                 <a:latin typeface="Calibri"/>
               </a:rPr>
-              <a:t>Yosys IR is RTLIL , `$and`, `$dff`, later `$_AOI3_` / `$_DFF_P_` after synth</a:t>
+              <a:t>Implement track</a:t>
             </a:r>
           </a:p>
           <a:p>
@@ -4549,7 +4576,7 @@
                 </a:solidFill>
                 <a:latin typeface="Calibri"/>
               </a:rPr>
-              <a:t>You will read `stat` and `dump`</a:t>
+              <a:t>Browser labs mirror all three</a:t>
             </a:r>
           </a:p>
         </p:txBody>
@@ -4645,7 +4672,7 @@
                 </a:solidFill>
                 <a:latin typeface="Calibri"/>
               </a:rPr>
-              <a:t>Begin</a:t>
+              <a:t>Browser lab track</a:t>
             </a:r>
           </a:p>
         </p:txBody>
@@ -4690,7 +4717,192 @@
                 </a:solidFill>
                 <a:latin typeface="Calibri"/>
               </a:rPr>
-              <a:t>Start with the toy proc lab for pass names, then continue into the real CLI modules</a:t>
+              <a:t>Open the course labs</a:t>
+            </a:r>
+          </a:p>
+          <a:p>
+            <a:pPr lvl="0" marL="457200" indent="-228600">
+              <a:buFont typeface="Calibri"/>
+              <a:spcAft>
+                <a:spcPts val="1000"/>
+              </a:spcAft>
+              <a:buSzPct val="100000"/>
+              <a:buChar char="•"/>
+              <a:lnSpc>
+                <a:spcPts val="2200"/>
+              </a:lnSpc>
+            </a:pPr>
+            <a:r>
+              <a:rPr sz="2000" b="0">
+                <a:solidFill>
+                  <a:srgbClr val="333333"/>
+                </a:solidFill>
+                <a:latin typeface="Calibri"/>
+              </a:rPr>
+              <a:t>Start at the pass-map proc lab</a:t>
+            </a:r>
+          </a:p>
+        </p:txBody>
+      </p:sp>
+      <p:sp>
+        <p:nvSpPr>
+          <p:cNvPr id="4" name="TextBox 3"/>
+          <p:cNvSpPr txBox="1"/>
+          <p:nvPr/>
+        </p:nvSpPr>
+        <p:spPr>
+          <a:xfrm>
+            <a:off x="548640" y="6355080"/>
+            <a:ext cx="11064240" cy="320040"/>
+          </a:xfrm>
+          <a:prstGeom prst="rect">
+            <a:avLst/>
+          </a:prstGeom>
+          <a:noFill/>
+        </p:spPr>
+        <p:txBody>
+          <a:bodyPr wrap="square">
+            <a:noAutofit/>
+          </a:bodyPr>
+          <a:lstStyle/>
+          <a:p>
+            <a:pPr algn="r">
+              <a:lnSpc>
+                <a:spcPts val="2200"/>
+              </a:lnSpc>
+              <a:defRPr sz="1000" b="0">
+                <a:solidFill>
+                  <a:srgbClr val="666666"/>
+                </a:solidFill>
+                <a:latin typeface="Calibri"/>
+              </a:defRPr>
+            </a:pPr>
+            <a:r>
+              <a:t>learn_yosys — 00 intro</a:t>
+            </a:r>
+          </a:p>
+        </p:txBody>
+      </p:sp>
+    </p:spTree>
+  </p:cSld>
+  <p:clrMapOvr>
+    <a:masterClrMapping/>
+  </p:clrMapOvr>
+</p:sld>
+</file>
+
+<file path=ppt/slides/slide7.xml><?xml version="1.0" encoding="utf-8"?>
+<p:sld xmlns:a="http://schemas.openxmlformats.org/drawingml/2006/main" xmlns:p="http://schemas.openxmlformats.org/presentationml/2006/main" xmlns:r="http://schemas.openxmlformats.org/officeDocument/2006/relationships">
+  <p:cSld>
+    <p:spTree>
+      <p:nvGrpSpPr>
+        <p:cNvPr id="1" name=""/>
+        <p:cNvGrpSpPr/>
+        <p:nvPr/>
+      </p:nvGrpSpPr>
+      <p:grpSpPr/>
+      <p:sp>
+        <p:nvSpPr>
+          <p:cNvPr id="2" name="TextBox 1"/>
+          <p:cNvSpPr txBox="1"/>
+          <p:nvPr/>
+        </p:nvSpPr>
+        <p:spPr>
+          <a:xfrm>
+            <a:off x="548640" y="411480"/>
+            <a:ext cx="11064240" cy="777240"/>
+          </a:xfrm>
+          <a:prstGeom prst="rect">
+            <a:avLst/>
+          </a:prstGeom>
+          <a:noFill/>
+        </p:spPr>
+        <p:txBody>
+          <a:bodyPr wrap="square">
+            <a:noAutofit/>
+          </a:bodyPr>
+          <a:lstStyle/>
+          <a:p>
+            <a:pPr>
+              <a:lnSpc>
+                <a:spcPts val="2200"/>
+              </a:lnSpc>
+            </a:pPr>
+            <a:r>
+              <a:rPr sz="2800" b="1">
+                <a:solidFill>
+                  <a:srgbClr val="1A1A2E"/>
+                </a:solidFill>
+                <a:latin typeface="Calibri"/>
+              </a:rPr>
+              <a:t>Next</a:t>
+            </a:r>
+          </a:p>
+        </p:txBody>
+      </p:sp>
+      <p:sp>
+        <p:nvSpPr>
+          <p:cNvPr id="3" name="TextBox 2"/>
+          <p:cNvSpPr txBox="1"/>
+          <p:nvPr/>
+        </p:nvSpPr>
+        <p:spPr>
+          <a:xfrm>
+            <a:off x="548640" y="1234440"/>
+            <a:ext cx="11064240" cy="4937760"/>
+          </a:xfrm>
+          <a:prstGeom prst="rect">
+            <a:avLst/>
+          </a:prstGeom>
+          <a:noFill/>
+        </p:spPr>
+        <p:txBody>
+          <a:bodyPr wrap="square">
+            <a:noAutofit/>
+          </a:bodyPr>
+          <a:lstStyle/>
+          <a:p>
+            <a:pPr lvl="0" marL="457200" indent="-228600">
+              <a:buFont typeface="Calibri"/>
+              <a:spcAft>
+                <a:spcPts val="1000"/>
+              </a:spcAft>
+              <a:buSzPct val="100000"/>
+              <a:buChar char="•"/>
+              <a:lnSpc>
+                <a:spcPts val="2200"/>
+              </a:lnSpc>
+            </a:pPr>
+            <a:r>
+              <a:rPr sz="2000" b="0">
+                <a:solidFill>
+                  <a:srgbClr val="333333"/>
+                </a:solidFill>
+                <a:latin typeface="Calibri"/>
+              </a:rPr>
+              <a:t>Complete the quiz for this part</a:t>
+            </a:r>
+          </a:p>
+          <a:p>
+            <a:pPr lvl="0" marL="457200" indent="-228600">
+              <a:buFont typeface="Calibri"/>
+              <a:spcAft>
+                <a:spcPts val="1000"/>
+              </a:spcAft>
+              <a:buSzPct val="100000"/>
+              <a:buChar char="•"/>
+              <a:lnSpc>
+                <a:spcPts val="2200"/>
+              </a:lnSpc>
+            </a:pPr>
+            <a:r>
+              <a:rPr sz="2000" b="0">
+                <a:solidFill>
+                  <a:srgbClr val="333333"/>
+                </a:solidFill>
+                <a:latin typeface="Calibri"/>
+              </a:rPr>
+              <a:t>Start with the pass-map proc lab for pass names</a:t>
             </a:r>
           </a:p>
         </p:txBody>

--- a/courses/learn_yosys/module00-00-intro/slides.pptx
+++ b/courses/learn_yosys/module00-00-intro/slides.pptx
@@ -12,6 +12,7 @@
     <p:sldId id="260" r:id="rId12"/>
     <p:sldId id="261" r:id="rId13"/>
     <p:sldId id="262" r:id="rId14"/>
+    <p:sldId id="263" r:id="rId15"/>
   </p:sldIdLst>
   <p:sldSz cx="12191695" cy="6858000" type="screen4x3"/>
   <p:notesSz cx="6858000" cy="9144000"/>
@@ -508,7 +509,7 @@
           <a:lstStyle/>
           <a:p>
             <a:r>
-              <a:t>learn_yosys has three parts: Part A is the interactive pass map on a small netlist; Part B drives real Yosys with .ys scripts on tiny_and_or.v; Part C teaches Yosys algorithms bound to real evidence.</a:t>
+              <a:t>learn_yosys has four parts: Part A is the interactive pass map; Part B drives real Yosys on tiny_and_or.v; Part C teaches algorithms bound to real evidence; Part D orients you to the Yosys C++ tree so you can contribute.</a:t>
             </a:r>
           </a:p>
         </p:txBody>
@@ -788,7 +789,7 @@
           <a:lstStyle/>
           <a:p>
             <a:r>
-              <a:t>Implement track: common/solvers.py (pass map), common/real_solvers.py (evidence), and common/algo_solvers.py plus partc_bind.py (algorithms). Browser labs mirror all three.</a:t>
+              <a:t>Part D: RTLIL C++ pillars, Pass registration, reading opt_clean, and a contribute checklist — orientation, not a full Yosys clone.</a:t>
             </a:r>
           </a:p>
         </p:txBody>
@@ -858,7 +859,7 @@
           <a:lstStyle/>
           <a:p>
             <a:r>
-              <a:t>Open the course labs. Start at the pass-map proc lab, continue into the real CLI modules, then the Part C algorithm labs.</a:t>
+              <a:t>Implement track: common/solvers.py, real_solvers.py, algo_solvers.py plus partc_bind.py, and internals_solvers.py. Browser labs mirror each part.</a:t>
             </a:r>
           </a:p>
         </p:txBody>
@@ -928,7 +929,77 @@
           <a:lstStyle/>
           <a:p>
             <a:r>
-              <a:t>Start with the pass-map proc lab for pass names, continue into the real CLI modules, then the Part C algorithm labs.</a:t>
+              <a:t>Open the course labs. Start at the pass-map proc lab, continue into CLI, algorithms, then internals.</a:t>
+            </a:r>
+          </a:p>
+        </p:txBody>
+      </p:sp>
+      <p:sp>
+        <p:nvSpPr>
+          <p:cNvPr id="4" name="Slide Number Placeholder 3"/>
+          <p:cNvSpPr>
+            <a:spLocks noGrp="1"/>
+          </p:cNvSpPr>
+          <p:nvPr>
+            <p:ph type="sldNum" idx="5" sz="quarter"/>
+          </p:nvPr>
+        </p:nvSpPr>
+        <p:spPr/>
+      </p:sp>
+    </p:spTree>
+  </p:cSld>
+  <p:clrMapOvr>
+    <a:masterClrMapping/>
+  </p:clrMapOvr>
+</p:notes>
+</file>
+
+<file path=ppt/notesSlides/notesSlide8.xml><?xml version="1.0" encoding="utf-8"?>
+<p:notes xmlns:a="http://schemas.openxmlformats.org/drawingml/2006/main" xmlns:p="http://schemas.openxmlformats.org/presentationml/2006/main" xmlns:r="http://schemas.openxmlformats.org/officeDocument/2006/relationships">
+  <p:cSld>
+    <p:spTree>
+      <p:nvGrpSpPr>
+        <p:cNvPr id="1" name=""/>
+        <p:cNvGrpSpPr/>
+        <p:nvPr/>
+      </p:nvGrpSpPr>
+      <p:grpSpPr>
+        <a:xfrm>
+          <a:off x="0" y="0"/>
+          <a:ext cx="0" cy="0"/>
+          <a:chOff x="0" y="0"/>
+          <a:chExt cx="0" cy="0"/>
+        </a:xfrm>
+      </p:grpSpPr>
+      <p:sp>
+        <p:nvSpPr>
+          <p:cNvPr id="2" name="Slide Image Placeholder 1"/>
+          <p:cNvSpPr>
+            <a:spLocks noGrp="1"/>
+          </p:cNvSpPr>
+          <p:nvPr>
+            <p:ph type="sldImg" idx="2"/>
+          </p:nvPr>
+        </p:nvSpPr>
+        <p:spPr/>
+      </p:sp>
+      <p:sp>
+        <p:nvSpPr>
+          <p:cNvPr id="3" name="Notes Placeholder 2"/>
+          <p:cNvSpPr>
+            <a:spLocks noGrp="1"/>
+          </p:cNvSpPr>
+          <p:nvPr>
+            <p:ph type="body" idx="3" sz="quarter"/>
+          </p:nvPr>
+        </p:nvSpPr>
+        <p:spPr/>
+        <p:txBody>
+          <a:bodyPr/>
+          <a:lstStyle/>
+          <a:p>
+            <a:r>
+              <a:t>Start with the pass-map proc lab for pass names, then CLI, algorithms, and internals.</a:t>
             </a:r>
           </a:p>
         </p:txBody>
@@ -3990,7 +4061,7 @@
                 </a:solidFill>
                 <a:latin typeface="Calibri"/>
               </a:rPr>
-              <a:t>Learn_yosys has three parts</a:t>
+              <a:t>Learn_yosys has four parts</a:t>
             </a:r>
           </a:p>
         </p:txBody>
@@ -4509,7 +4580,7 @@
                 </a:solidFill>
                 <a:latin typeface="Calibri"/>
               </a:rPr>
-              <a:t>Implement track</a:t>
+              <a:t>Part D internals</a:t>
             </a:r>
           </a:p>
         </p:txBody>
@@ -4554,29 +4625,7 @@
                 </a:solidFill>
                 <a:latin typeface="Calibri"/>
               </a:rPr>
-              <a:t>Implement track</a:t>
-            </a:r>
-          </a:p>
-          <a:p>
-            <a:pPr lvl="0" marL="457200" indent="-228600">
-              <a:buFont typeface="Calibri"/>
-              <a:spcAft>
-                <a:spcPts val="1000"/>
-              </a:spcAft>
-              <a:buSzPct val="100000"/>
-              <a:buChar char="•"/>
-              <a:lnSpc>
-                <a:spcPts val="2200"/>
-              </a:lnSpc>
-            </a:pPr>
-            <a:r>
-              <a:rPr sz="2000" b="0">
-                <a:solidFill>
-                  <a:srgbClr val="333333"/>
-                </a:solidFill>
-                <a:latin typeface="Calibri"/>
-              </a:rPr>
-              <a:t>Browser labs mirror all three</a:t>
+              <a:t>Part D: RTLIL C++ pillars, Pass registration, reading opt_clean</a:t>
             </a:r>
           </a:p>
         </p:txBody>
@@ -4672,7 +4721,7 @@
                 </a:solidFill>
                 <a:latin typeface="Calibri"/>
               </a:rPr>
-              <a:t>Browser lab track</a:t>
+              <a:t>Implement track</a:t>
             </a:r>
           </a:p>
         </p:txBody>
@@ -4717,7 +4766,7 @@
                 </a:solidFill>
                 <a:latin typeface="Calibri"/>
               </a:rPr>
-              <a:t>Open the course labs</a:t>
+              <a:t>Implement track</a:t>
             </a:r>
           </a:p>
           <a:p>
@@ -4739,7 +4788,7 @@
                 </a:solidFill>
                 <a:latin typeface="Calibri"/>
               </a:rPr>
-              <a:t>Start at the pass-map proc lab</a:t>
+              <a:t>Browser labs mirror each part</a:t>
             </a:r>
           </a:p>
         </p:txBody>
@@ -4835,7 +4884,7 @@
                 </a:solidFill>
                 <a:latin typeface="Calibri"/>
               </a:rPr>
-              <a:t>Next</a:t>
+              <a:t>Browser lab track</a:t>
             </a:r>
           </a:p>
         </p:txBody>
@@ -4880,7 +4929,7 @@
                 </a:solidFill>
                 <a:latin typeface="Calibri"/>
               </a:rPr>
-              <a:t>Complete the quiz for this part</a:t>
+              <a:t>Open the course labs</a:t>
             </a:r>
           </a:p>
           <a:p>
@@ -4902,7 +4951,170 @@
                 </a:solidFill>
                 <a:latin typeface="Calibri"/>
               </a:rPr>
-              <a:t>Start with the pass-map proc lab for pass names</a:t>
+              <a:t>Start at the pass-map proc lab, continue into CLI, algorithms, then internals</a:t>
+            </a:r>
+          </a:p>
+        </p:txBody>
+      </p:sp>
+      <p:sp>
+        <p:nvSpPr>
+          <p:cNvPr id="4" name="TextBox 3"/>
+          <p:cNvSpPr txBox="1"/>
+          <p:nvPr/>
+        </p:nvSpPr>
+        <p:spPr>
+          <a:xfrm>
+            <a:off x="548640" y="6355080"/>
+            <a:ext cx="11064240" cy="320040"/>
+          </a:xfrm>
+          <a:prstGeom prst="rect">
+            <a:avLst/>
+          </a:prstGeom>
+          <a:noFill/>
+        </p:spPr>
+        <p:txBody>
+          <a:bodyPr wrap="square">
+            <a:noAutofit/>
+          </a:bodyPr>
+          <a:lstStyle/>
+          <a:p>
+            <a:pPr algn="r">
+              <a:lnSpc>
+                <a:spcPts val="2200"/>
+              </a:lnSpc>
+              <a:defRPr sz="1000" b="0">
+                <a:solidFill>
+                  <a:srgbClr val="666666"/>
+                </a:solidFill>
+                <a:latin typeface="Calibri"/>
+              </a:defRPr>
+            </a:pPr>
+            <a:r>
+              <a:t>learn_yosys — 00 intro</a:t>
+            </a:r>
+          </a:p>
+        </p:txBody>
+      </p:sp>
+    </p:spTree>
+  </p:cSld>
+  <p:clrMapOvr>
+    <a:masterClrMapping/>
+  </p:clrMapOvr>
+</p:sld>
+</file>
+
+<file path=ppt/slides/slide8.xml><?xml version="1.0" encoding="utf-8"?>
+<p:sld xmlns:a="http://schemas.openxmlformats.org/drawingml/2006/main" xmlns:p="http://schemas.openxmlformats.org/presentationml/2006/main" xmlns:r="http://schemas.openxmlformats.org/officeDocument/2006/relationships">
+  <p:cSld>
+    <p:spTree>
+      <p:nvGrpSpPr>
+        <p:cNvPr id="1" name=""/>
+        <p:cNvGrpSpPr/>
+        <p:nvPr/>
+      </p:nvGrpSpPr>
+      <p:grpSpPr/>
+      <p:sp>
+        <p:nvSpPr>
+          <p:cNvPr id="2" name="TextBox 1"/>
+          <p:cNvSpPr txBox="1"/>
+          <p:nvPr/>
+        </p:nvSpPr>
+        <p:spPr>
+          <a:xfrm>
+            <a:off x="548640" y="411480"/>
+            <a:ext cx="11064240" cy="777240"/>
+          </a:xfrm>
+          <a:prstGeom prst="rect">
+            <a:avLst/>
+          </a:prstGeom>
+          <a:noFill/>
+        </p:spPr>
+        <p:txBody>
+          <a:bodyPr wrap="square">
+            <a:noAutofit/>
+          </a:bodyPr>
+          <a:lstStyle/>
+          <a:p>
+            <a:pPr>
+              <a:lnSpc>
+                <a:spcPts val="2200"/>
+              </a:lnSpc>
+            </a:pPr>
+            <a:r>
+              <a:rPr sz="2800" b="1">
+                <a:solidFill>
+                  <a:srgbClr val="1A1A2E"/>
+                </a:solidFill>
+                <a:latin typeface="Calibri"/>
+              </a:rPr>
+              <a:t>Next</a:t>
+            </a:r>
+          </a:p>
+        </p:txBody>
+      </p:sp>
+      <p:sp>
+        <p:nvSpPr>
+          <p:cNvPr id="3" name="TextBox 2"/>
+          <p:cNvSpPr txBox="1"/>
+          <p:nvPr/>
+        </p:nvSpPr>
+        <p:spPr>
+          <a:xfrm>
+            <a:off x="548640" y="1234440"/>
+            <a:ext cx="11064240" cy="4937760"/>
+          </a:xfrm>
+          <a:prstGeom prst="rect">
+            <a:avLst/>
+          </a:prstGeom>
+          <a:noFill/>
+        </p:spPr>
+        <p:txBody>
+          <a:bodyPr wrap="square">
+            <a:noAutofit/>
+          </a:bodyPr>
+          <a:lstStyle/>
+          <a:p>
+            <a:pPr lvl="0" marL="457200" indent="-228600">
+              <a:buFont typeface="Calibri"/>
+              <a:spcAft>
+                <a:spcPts val="1000"/>
+              </a:spcAft>
+              <a:buSzPct val="100000"/>
+              <a:buChar char="•"/>
+              <a:lnSpc>
+                <a:spcPts val="2200"/>
+              </a:lnSpc>
+            </a:pPr>
+            <a:r>
+              <a:rPr sz="2000" b="0">
+                <a:solidFill>
+                  <a:srgbClr val="333333"/>
+                </a:solidFill>
+                <a:latin typeface="Calibri"/>
+              </a:rPr>
+              <a:t>Complete the quiz for this part</a:t>
+            </a:r>
+          </a:p>
+          <a:p>
+            <a:pPr lvl="0" marL="457200" indent="-228600">
+              <a:buFont typeface="Calibri"/>
+              <a:spcAft>
+                <a:spcPts val="1000"/>
+              </a:spcAft>
+              <a:buSzPct val="100000"/>
+              <a:buChar char="•"/>
+              <a:lnSpc>
+                <a:spcPts val="2200"/>
+              </a:lnSpc>
+            </a:pPr>
+            <a:r>
+              <a:rPr sz="2000" b="0">
+                <a:solidFill>
+                  <a:srgbClr val="333333"/>
+                </a:solidFill>
+                <a:latin typeface="Calibri"/>
+              </a:rPr>
+              <a:t>Start with the pass-map proc lab for pass names, then CLI, algorithms, and internals</a:t>
             </a:r>
           </a:p>
         </p:txBody>
